--- a/presentations/ispring-course/module-01-stropovka-gruzov/live-preview/S003_npa_preview_2026-06-22_v4.pptx
+++ b/presentations/ispring-course/module-01-stropovka-gruzov/live-preview/S003_npa_preview_2026-06-22_v4.pptx
@@ -292,7 +292,7 @@
           <a:p>
             <a:fld id="{5BCAD085-E8A6-8845-BD4E-CB4CCA059FC4}" type="datetimeFigureOut">
               <a:rPr lang="en-US" smtClean="0"/>
-              <a:t>6/22/2026</a:t>
+              <a:t>6/23/2026</a:t>
             </a:fld>
             <a:endParaRPr lang="en-US"/>
           </a:p>
@@ -462,7 +462,7 @@
           <a:p>
             <a:fld id="{5BCAD085-E8A6-8845-BD4E-CB4CCA059FC4}" type="datetimeFigureOut">
               <a:rPr lang="en-US" smtClean="0"/>
-              <a:t>6/22/2026</a:t>
+              <a:t>6/23/2026</a:t>
             </a:fld>
             <a:endParaRPr lang="en-US"/>
           </a:p>
@@ -642,7 +642,7 @@
           <a:p>
             <a:fld id="{5BCAD085-E8A6-8845-BD4E-CB4CCA059FC4}" type="datetimeFigureOut">
               <a:rPr lang="en-US" smtClean="0"/>
-              <a:t>6/22/2026</a:t>
+              <a:t>6/23/2026</a:t>
             </a:fld>
             <a:endParaRPr lang="en-US"/>
           </a:p>
@@ -812,7 +812,7 @@
           <a:p>
             <a:fld id="{5BCAD085-E8A6-8845-BD4E-CB4CCA059FC4}" type="datetimeFigureOut">
               <a:rPr lang="en-US" smtClean="0"/>
-              <a:t>6/22/2026</a:t>
+              <a:t>6/23/2026</a:t>
             </a:fld>
             <a:endParaRPr lang="en-US"/>
           </a:p>
@@ -1058,7 +1058,7 @@
           <a:p>
             <a:fld id="{5BCAD085-E8A6-8845-BD4E-CB4CCA059FC4}" type="datetimeFigureOut">
               <a:rPr lang="en-US" smtClean="0"/>
-              <a:t>6/22/2026</a:t>
+              <a:t>6/23/2026</a:t>
             </a:fld>
             <a:endParaRPr lang="en-US"/>
           </a:p>
@@ -1346,7 +1346,7 @@
           <a:p>
             <a:fld id="{5BCAD085-E8A6-8845-BD4E-CB4CCA059FC4}" type="datetimeFigureOut">
               <a:rPr lang="en-US" smtClean="0"/>
-              <a:t>6/22/2026</a:t>
+              <a:t>6/23/2026</a:t>
             </a:fld>
             <a:endParaRPr lang="en-US"/>
           </a:p>
@@ -1768,7 +1768,7 @@
           <a:p>
             <a:fld id="{5BCAD085-E8A6-8845-BD4E-CB4CCA059FC4}" type="datetimeFigureOut">
               <a:rPr lang="en-US" smtClean="0"/>
-              <a:t>6/22/2026</a:t>
+              <a:t>6/23/2026</a:t>
             </a:fld>
             <a:endParaRPr lang="en-US"/>
           </a:p>
@@ -1886,7 +1886,7 @@
           <a:p>
             <a:fld id="{5BCAD085-E8A6-8845-BD4E-CB4CCA059FC4}" type="datetimeFigureOut">
               <a:rPr lang="en-US" smtClean="0"/>
-              <a:t>6/22/2026</a:t>
+              <a:t>6/23/2026</a:t>
             </a:fld>
             <a:endParaRPr lang="en-US"/>
           </a:p>
@@ -1981,7 +1981,7 @@
           <a:p>
             <a:fld id="{5BCAD085-E8A6-8845-BD4E-CB4CCA059FC4}" type="datetimeFigureOut">
               <a:rPr lang="en-US" smtClean="0"/>
-              <a:t>6/22/2026</a:t>
+              <a:t>6/23/2026</a:t>
             </a:fld>
             <a:endParaRPr lang="en-US"/>
           </a:p>
@@ -2258,7 +2258,7 @@
           <a:p>
             <a:fld id="{5BCAD085-E8A6-8845-BD4E-CB4CCA059FC4}" type="datetimeFigureOut">
               <a:rPr lang="en-US" smtClean="0"/>
-              <a:t>6/22/2026</a:t>
+              <a:t>6/23/2026</a:t>
             </a:fld>
             <a:endParaRPr lang="en-US"/>
           </a:p>
@@ -2511,7 +2511,7 @@
           <a:p>
             <a:fld id="{5BCAD085-E8A6-8845-BD4E-CB4CCA059FC4}" type="datetimeFigureOut">
               <a:rPr lang="en-US" smtClean="0"/>
-              <a:t>6/22/2026</a:t>
+              <a:t>6/23/2026</a:t>
             </a:fld>
             <a:endParaRPr lang="en-US"/>
           </a:p>
@@ -2724,7 +2724,7 @@
           <a:p>
             <a:fld id="{5BCAD085-E8A6-8845-BD4E-CB4CCA059FC4}" type="datetimeFigureOut">
               <a:rPr lang="en-US" smtClean="0"/>
-              <a:t>6/22/2026</a:t>
+              <a:t>6/23/2026</a:t>
             </a:fld>
             <a:endParaRPr lang="en-US"/>
           </a:p>
@@ -3465,7 +3465,7 @@
       </p:sp>
       <p:sp>
         <p:nvSpPr>
-          <p:cNvPr id="10" name="Rectangle 9">
+          <p:cNvPr id="10" name="S003_LAW_LINK_01">
             <a:hlinkClick r:id="rId2" action="ppaction://hlinksldjump"/>
           </p:cNvPr>
           <p:cNvSpPr/>
@@ -3627,7 +3627,7 @@
       </p:sp>
       <p:sp>
         <p:nvSpPr>
-          <p:cNvPr id="13" name="Rectangle 12">
+          <p:cNvPr id="13" name="S003_LAW_LINK_02">
             <a:hlinkClick r:id="rId3" action="ppaction://hlinksldjump"/>
           </p:cNvPr>
           <p:cNvSpPr/>
@@ -3788,7 +3788,7 @@
       </p:sp>
       <p:sp>
         <p:nvSpPr>
-          <p:cNvPr id="16" name="Rectangle 15">
+          <p:cNvPr id="16" name="S003_LAW_LINK_03">
             <a:hlinkClick r:id="rId4" action="ppaction://hlinksldjump"/>
           </p:cNvPr>
           <p:cNvSpPr/>
@@ -3950,7 +3950,7 @@
       </p:sp>
       <p:sp>
         <p:nvSpPr>
-          <p:cNvPr id="19" name="Rectangle 18">
+          <p:cNvPr id="19" name="S003_LAW_LINK_04">
             <a:hlinkClick r:id="rId5" action="ppaction://hlinksldjump"/>
           </p:cNvPr>
           <p:cNvSpPr/>
@@ -4109,26 +4109,180 @@
           </a:p>
         </p:txBody>
       </p:sp>
-      <p:sp>
-        <p:nvSpPr>
-          <p:cNvPr id="22" name="Rounded Rectangle 21"/>
-          <p:cNvSpPr/>
-          <p:nvPr/>
-        </p:nvSpPr>
-        <p:spPr>
+      <p:grpSp>
+        <p:nvGrpSpPr>
+          <p:cNvPr id="27" name="S003_INFO_GROUP"/>
+          <p:cNvGrpSpPr/>
+          <p:nvPr/>
+        </p:nvGrpSpPr>
+        <p:grpSpPr>
           <a:xfrm>
             <a:off x="9555480" y="1691640"/>
-            <a:ext cx="1965960" cy="3154680"/>
-          </a:xfrm>
-          <a:prstGeom prst="roundRect">
-            <a:avLst/>
-          </a:prstGeom>
-          <a:solidFill>
-            <a:srgbClr val="FFFFFF"/>
-          </a:solidFill>
-          <a:ln w="19050">
+            <a:ext cx="1965960" cy="1965960"/>
+            <a:chOff x="9555480" y="1691640"/>
+            <a:chExt cx="1965960" cy="1965960"/>
+          </a:xfrm>
+        </p:grpSpPr>
+        <p:sp>
+          <p:nvSpPr>
+            <p:cNvPr id="22" name="S003_INFO_PANEL"/>
+            <p:cNvSpPr/>
+            <p:nvPr/>
+          </p:nvSpPr>
+          <p:spPr>
+            <a:xfrm>
+              <a:off x="9555480" y="1691640"/>
+              <a:ext cx="1965960" cy="1965960"/>
+            </a:xfrm>
+            <a:prstGeom prst="roundRect">
+              <a:avLst/>
+            </a:prstGeom>
+            <a:solidFill>
+              <a:srgbClr val="FFFFFF"/>
+            </a:solidFill>
+            <a:ln w="19050">
+              <a:solidFill>
+                <a:srgbClr val="42855F"/>
+              </a:solidFill>
+            </a:ln>
+          </p:spPr>
+          <p:style>
+            <a:lnRef idx="1">
+              <a:schemeClr val="accent1"/>
+            </a:lnRef>
+            <a:fillRef idx="3">
+              <a:schemeClr val="accent1"/>
+            </a:fillRef>
+            <a:effectRef idx="2">
+              <a:schemeClr val="accent1"/>
+            </a:effectRef>
+            <a:fontRef idx="minor">
+              <a:schemeClr val="lt1"/>
+            </a:fontRef>
+          </p:style>
+          <p:txBody>
+            <a:bodyPr rtlCol="0" anchor="ctr"/>
+            <a:lstStyle/>
+            <a:p>
+              <a:pPr algn="ctr"/>
+              <a:endParaRPr/>
+            </a:p>
+          </p:txBody>
+        </p:sp>
+        <p:sp>
+          <p:nvSpPr>
+            <p:cNvPr id="23" name="S003_INFO_HEAD"/>
+            <p:cNvSpPr/>
+            <p:nvPr/>
+          </p:nvSpPr>
+          <p:spPr>
+            <a:xfrm>
+              <a:off x="9555480" y="1691640"/>
+              <a:ext cx="1965960" cy="566928"/>
+            </a:xfrm>
+            <a:prstGeom prst="roundRect">
+              <a:avLst/>
+            </a:prstGeom>
             <a:solidFill>
               <a:srgbClr val="42855F"/>
+            </a:solidFill>
+            <a:ln>
+              <a:solidFill>
+                <a:srgbClr val="42855F"/>
+              </a:solidFill>
+            </a:ln>
+          </p:spPr>
+          <p:style>
+            <a:lnRef idx="1">
+              <a:schemeClr val="accent1"/>
+            </a:lnRef>
+            <a:fillRef idx="3">
+              <a:schemeClr val="accent1"/>
+            </a:fillRef>
+            <a:effectRef idx="2">
+              <a:schemeClr val="accent1"/>
+            </a:effectRef>
+            <a:fontRef idx="minor">
+              <a:schemeClr val="lt1"/>
+            </a:fontRef>
+          </p:style>
+          <p:txBody>
+            <a:bodyPr rtlCol="0" anchor="ctr"/>
+            <a:lstStyle/>
+            <a:p>
+              <a:pPr algn="ctr"/>
+              <a:r>
+                <a:rPr sz="1900" b="1">
+                  <a:solidFill>
+                    <a:srgbClr val="FFFFFF"/>
+                  </a:solidFill>
+                </a:rPr>
+                <a:t>Интерактив</a:t>
+              </a:r>
+            </a:p>
+          </p:txBody>
+        </p:sp>
+        <p:sp>
+          <p:nvSpPr>
+            <p:cNvPr id="24" name="S003_INFO_BODY"/>
+            <p:cNvSpPr txBox="1"/>
+            <p:nvPr/>
+          </p:nvSpPr>
+          <p:spPr>
+            <a:xfrm>
+              <a:off x="9784080" y="2478024"/>
+              <a:ext cx="1508760" cy="996696"/>
+            </a:xfrm>
+            <a:prstGeom prst="rect">
+              <a:avLst/>
+            </a:prstGeom>
+            <a:noFill/>
+          </p:spPr>
+          <p:txBody>
+            <a:bodyPr wrap="square">
+              <a:spAutoFit/>
+            </a:bodyPr>
+            <a:lstStyle/>
+            <a:p>
+              <a:pPr>
+                <a:spcAft>
+                  <a:spcPts val="800"/>
+                </a:spcAft>
+              </a:pPr>
+              <a:r>
+                <a:rPr sz="1500">
+                  <a:solidFill>
+                    <a:srgbClr val="212B36"/>
+                  </a:solidFill>
+                </a:rPr>
+                <a:t>Нажмите на название документа.</a:t>
+              </a:r>
+            </a:p>
+          </p:txBody>
+        </p:sp>
+      </p:grpSp>
+      <p:sp>
+        <p:nvSpPr>
+          <p:cNvPr id="25" name="S003_BACK">
+            <a:hlinkClick r:id="rId6" action="ppaction://hlinksldjump"/>
+          </p:cNvPr>
+          <p:cNvSpPr/>
+          <p:nvPr/>
+        </p:nvSpPr>
+        <p:spPr>
+          <a:xfrm>
+            <a:off x="640080" y="5989320"/>
+            <a:ext cx="2148840" cy="457200"/>
+          </a:xfrm>
+          <a:prstGeom prst="roundRect">
+            <a:avLst/>
+          </a:prstGeom>
+          <a:solidFill>
+            <a:srgbClr val="537795"/>
+          </a:solidFill>
+          <a:ln>
+            <a:solidFill>
+              <a:srgbClr val="537795"/>
             </a:solidFill>
           </a:ln>
         </p:spPr>
@@ -4151,30 +4305,39 @@
           <a:lstStyle/>
           <a:p>
             <a:pPr algn="ctr"/>
-            <a:endParaRPr/>
-          </a:p>
-        </p:txBody>
-      </p:sp>
-      <p:sp>
-        <p:nvSpPr>
-          <p:cNvPr id="23" name="Rounded Rectangle 22"/>
+            <a:r>
+              <a:rPr sz="1800" b="1">
+                <a:solidFill>
+                  <a:srgbClr val="FFFFFF"/>
+                </a:solidFill>
+              </a:rPr>
+              <a:t>НАЗАД</a:t>
+            </a:r>
+          </a:p>
+        </p:txBody>
+      </p:sp>
+      <p:sp>
+        <p:nvSpPr>
+          <p:cNvPr id="26" name="S003_NEXT">
+            <a:hlinkClick r:id="rId2" action="ppaction://hlinksldjump"/>
+          </p:cNvPr>
           <p:cNvSpPr/>
           <p:nvPr/>
         </p:nvSpPr>
         <p:spPr>
           <a:xfrm>
-            <a:off x="9555480" y="1691640"/>
-            <a:ext cx="1965960" cy="566928"/>
+            <a:off x="9372600" y="5989320"/>
+            <a:ext cx="2148840" cy="457200"/>
           </a:xfrm>
           <a:prstGeom prst="roundRect">
             <a:avLst/>
           </a:prstGeom>
           <a:solidFill>
-            <a:srgbClr val="42855F"/>
+            <a:srgbClr val="DE7436"/>
           </a:solidFill>
           <a:ln>
             <a:solidFill>
-              <a:srgbClr val="42855F"/>
+              <a:srgbClr val="DE7436"/>
             </a:solidFill>
           </a:ln>
         </p:spPr>
@@ -4198,184 +4361,6 @@
           <a:p>
             <a:pPr algn="ctr"/>
             <a:r>
-              <a:rPr sz="1900" b="1">
-                <a:solidFill>
-                  <a:srgbClr val="FFFFFF"/>
-                </a:solidFill>
-              </a:rPr>
-              <a:t>Интерактив</a:t>
-            </a:r>
-          </a:p>
-        </p:txBody>
-      </p:sp>
-      <p:sp>
-        <p:nvSpPr>
-          <p:cNvPr id="24" name="TextBox 23"/>
-          <p:cNvSpPr txBox="1"/>
-          <p:nvPr/>
-        </p:nvSpPr>
-        <p:spPr>
-          <a:xfrm>
-            <a:off x="9784080" y="2478024"/>
-            <a:ext cx="1508760" cy="2185416"/>
-          </a:xfrm>
-          <a:prstGeom prst="rect">
-            <a:avLst/>
-          </a:prstGeom>
-          <a:noFill/>
-        </p:spPr>
-        <p:txBody>
-          <a:bodyPr wrap="square">
-            <a:spAutoFit/>
-          </a:bodyPr>
-          <a:lstStyle/>
-          <a:p>
-            <a:pPr>
-              <a:spcAft>
-                <a:spcPts val="800"/>
-              </a:spcAft>
-            </a:pPr>
-            <a:r>
-              <a:rPr sz="1500">
-                <a:solidFill>
-                  <a:srgbClr val="212B36"/>
-                </a:solidFill>
-              </a:rPr>
-              <a:t>Нажмите на название документа.</a:t>
-            </a:r>
-          </a:p>
-          <a:p>
-            <a:pPr>
-              <a:spcAft>
-                <a:spcPts val="800"/>
-              </a:spcAft>
-            </a:pPr>
-            <a:r>
-              <a:rPr sz="1500">
-                <a:solidFill>
-                  <a:srgbClr val="212B36"/>
-                </a:solidFill>
-              </a:rPr>
-              <a:t>Откроется короткий подвал-справка.</a:t>
-            </a:r>
-          </a:p>
-          <a:p>
-            <a:pPr>
-              <a:spcAft>
-                <a:spcPts val="800"/>
-              </a:spcAft>
-            </a:pPr>
-            <a:r>
-              <a:rPr sz="1500">
-                <a:solidFill>
-                  <a:srgbClr val="212B36"/>
-                </a:solidFill>
-              </a:rPr>
-              <a:t>Из подвала есть возврат в S003.</a:t>
-            </a:r>
-          </a:p>
-        </p:txBody>
-      </p:sp>
-      <p:sp>
-        <p:nvSpPr>
-          <p:cNvPr id="25" name="Rounded Rectangle 24">
-            <a:hlinkClick r:id="rId6" action="ppaction://hlinksldjump"/>
-          </p:cNvPr>
-          <p:cNvSpPr/>
-          <p:nvPr/>
-        </p:nvSpPr>
-        <p:spPr>
-          <a:xfrm>
-            <a:off x="640080" y="5989320"/>
-            <a:ext cx="2148840" cy="457200"/>
-          </a:xfrm>
-          <a:prstGeom prst="roundRect">
-            <a:avLst/>
-          </a:prstGeom>
-          <a:solidFill>
-            <a:srgbClr val="537795"/>
-          </a:solidFill>
-          <a:ln>
-            <a:solidFill>
-              <a:srgbClr val="537795"/>
-            </a:solidFill>
-          </a:ln>
-        </p:spPr>
-        <p:style>
-          <a:lnRef idx="1">
-            <a:schemeClr val="accent1"/>
-          </a:lnRef>
-          <a:fillRef idx="3">
-            <a:schemeClr val="accent1"/>
-          </a:fillRef>
-          <a:effectRef idx="2">
-            <a:schemeClr val="accent1"/>
-          </a:effectRef>
-          <a:fontRef idx="minor">
-            <a:schemeClr val="lt1"/>
-          </a:fontRef>
-        </p:style>
-        <p:txBody>
-          <a:bodyPr rtlCol="0" anchor="ctr"/>
-          <a:lstStyle/>
-          <a:p>
-            <a:pPr algn="ctr"/>
-            <a:r>
-              <a:rPr sz="1800" b="1">
-                <a:solidFill>
-                  <a:srgbClr val="FFFFFF"/>
-                </a:solidFill>
-              </a:rPr>
-              <a:t>НАЗАД</a:t>
-            </a:r>
-          </a:p>
-        </p:txBody>
-      </p:sp>
-      <p:sp>
-        <p:nvSpPr>
-          <p:cNvPr id="26" name="Rounded Rectangle 25">
-            <a:hlinkClick r:id="rId2" action="ppaction://hlinksldjump"/>
-          </p:cNvPr>
-          <p:cNvSpPr/>
-          <p:nvPr/>
-        </p:nvSpPr>
-        <p:spPr>
-          <a:xfrm>
-            <a:off x="9372600" y="5989320"/>
-            <a:ext cx="2148840" cy="457200"/>
-          </a:xfrm>
-          <a:prstGeom prst="roundRect">
-            <a:avLst/>
-          </a:prstGeom>
-          <a:solidFill>
-            <a:srgbClr val="DE7436"/>
-          </a:solidFill>
-          <a:ln>
-            <a:solidFill>
-              <a:srgbClr val="DE7436"/>
-            </a:solidFill>
-          </a:ln>
-        </p:spPr>
-        <p:style>
-          <a:lnRef idx="1">
-            <a:schemeClr val="accent1"/>
-          </a:lnRef>
-          <a:fillRef idx="3">
-            <a:schemeClr val="accent1"/>
-          </a:fillRef>
-          <a:effectRef idx="2">
-            <a:schemeClr val="accent1"/>
-          </a:effectRef>
-          <a:fontRef idx="minor">
-            <a:schemeClr val="lt1"/>
-          </a:fontRef>
-        </p:style>
-        <p:txBody>
-          <a:bodyPr rtlCol="0" anchor="ctr"/>
-          <a:lstStyle/>
-          <a:p>
-            <a:pPr algn="ctr"/>
-            <a:r>
               <a:rPr sz="1800" b="1">
                 <a:solidFill>
                   <a:srgbClr val="FFFFFF"/>
@@ -4391,6 +4376,136 @@
   <p:clrMapOvr>
     <a:masterClrMapping/>
   </p:clrMapOvr>
+  <p:timing>
+    <p:tnLst>
+      <p:par>
+        <p:cTn id="1" dur="indefinite" restart="never" nodeType="tmRoot">
+          <p:childTnLst>
+            <p:seq concurrent="1" nextAc="seek">
+              <p:cTn id="2" dur="indefinite" nodeType="mainSeq">
+                <p:childTnLst>
+                  <p:par>
+                    <p:cTn id="3" fill="hold">
+                      <p:stCondLst>
+                        <p:cond delay="indefinite"/>
+                        <p:cond evt="onBegin" delay="0">
+                          <p:tn val="2"/>
+                        </p:cond>
+                      </p:stCondLst>
+                      <p:childTnLst>
+                        <p:par>
+                          <p:cTn id="4" fill="hold">
+                            <p:stCondLst>
+                              <p:cond delay="0"/>
+                            </p:stCondLst>
+                            <p:childTnLst>
+                              <p:par>
+                                <p:cTn id="5" presetID="10" presetClass="entr" presetSubtype="0" fill="hold" nodeType="afterEffect">
+                                  <p:stCondLst>
+                                    <p:cond delay="2000"/>
+                                  </p:stCondLst>
+                                  <p:childTnLst>
+                                    <p:set>
+                                      <p:cBhvr>
+                                        <p:cTn id="6" dur="1" fill="hold">
+                                          <p:stCondLst>
+                                            <p:cond delay="0"/>
+                                          </p:stCondLst>
+                                        </p:cTn>
+                                        <p:tgtEl>
+                                          <p:spTgt spid="27"/>
+                                        </p:tgtEl>
+                                        <p:attrNameLst>
+                                          <p:attrName>style.visibility</p:attrName>
+                                        </p:attrNameLst>
+                                      </p:cBhvr>
+                                      <p:to>
+                                        <p:strVal val="visible"/>
+                                      </p:to>
+                                    </p:set>
+                                    <p:animEffect transition="in" filter="fade">
+                                      <p:cBhvr>
+                                        <p:cTn id="7" dur="900"/>
+                                        <p:tgtEl>
+                                          <p:spTgt spid="27"/>
+                                        </p:tgtEl>
+                                      </p:cBhvr>
+                                    </p:animEffect>
+                                  </p:childTnLst>
+                                </p:cTn>
+                              </p:par>
+                            </p:childTnLst>
+                          </p:cTn>
+                        </p:par>
+                        <p:par>
+                          <p:cTn id="8" fill="hold">
+                            <p:stCondLst>
+                              <p:cond delay="2900"/>
+                            </p:stCondLst>
+                            <p:childTnLst>
+                              <p:par>
+                                <p:cTn id="9" presetID="10" presetClass="exit" presetSubtype="0" fill="hold" nodeType="afterEffect">
+                                  <p:stCondLst>
+                                    <p:cond delay="5000"/>
+                                  </p:stCondLst>
+                                  <p:childTnLst>
+                                    <p:animEffect transition="out" filter="fade">
+                                      <p:cBhvr>
+                                        <p:cTn id="10" dur="900"/>
+                                        <p:tgtEl>
+                                          <p:spTgt spid="27"/>
+                                        </p:tgtEl>
+                                      </p:cBhvr>
+                                    </p:animEffect>
+                                    <p:set>
+                                      <p:cBhvr>
+                                        <p:cTn id="11" dur="1" fill="hold">
+                                          <p:stCondLst>
+                                            <p:cond delay="899"/>
+                                          </p:stCondLst>
+                                        </p:cTn>
+                                        <p:tgtEl>
+                                          <p:spTgt spid="27"/>
+                                        </p:tgtEl>
+                                        <p:attrNameLst>
+                                          <p:attrName>style.visibility</p:attrName>
+                                        </p:attrNameLst>
+                                      </p:cBhvr>
+                                      <p:to>
+                                        <p:strVal val="hidden"/>
+                                      </p:to>
+                                    </p:set>
+                                  </p:childTnLst>
+                                </p:cTn>
+                              </p:par>
+                            </p:childTnLst>
+                          </p:cTn>
+                        </p:par>
+                      </p:childTnLst>
+                    </p:cTn>
+                  </p:par>
+                </p:childTnLst>
+              </p:cTn>
+              <p:prevCondLst>
+                <p:cond evt="onPrev" delay="0">
+                  <p:tgtEl>
+                    <p:sldTgt/>
+                  </p:tgtEl>
+                </p:cond>
+              </p:prevCondLst>
+              <p:nextCondLst>
+                <p:cond evt="onNext" delay="0">
+                  <p:tgtEl>
+                    <p:sldTgt/>
+                  </p:tgtEl>
+                </p:cond>
+              </p:nextCondLst>
+            </p:seq>
+          </p:childTnLst>
+        </p:cTn>
+      </p:par>
+    </p:tnLst>
+  </p:timing>
 </p:sld>
 </file>
 
@@ -5042,7 +5157,7 @@
       </p:sp>
       <p:sp>
         <p:nvSpPr>
-          <p:cNvPr id="15" name="Rounded Rectangle 14">
+          <p:cNvPr id="15" name="S003_P01_BACK">
             <a:hlinkClick r:id="rId2" action="ppaction://hlinksldjump"/>
           </p:cNvPr>
           <p:cNvSpPr/>
@@ -5751,7 +5866,7 @@
       </p:sp>
       <p:sp>
         <p:nvSpPr>
-          <p:cNvPr id="15" name="Rounded Rectangle 14">
+          <p:cNvPr id="15" name="S003_P02_BACK">
             <a:hlinkClick r:id="rId2" action="ppaction://hlinksldjump"/>
           </p:cNvPr>
           <p:cNvSpPr/>
@@ -6460,7 +6575,7 @@
       </p:sp>
       <p:sp>
         <p:nvSpPr>
-          <p:cNvPr id="15" name="Rounded Rectangle 14">
+          <p:cNvPr id="15" name="S003_P03_BACK">
             <a:hlinkClick r:id="rId2" action="ppaction://hlinksldjump"/>
           </p:cNvPr>
           <p:cNvSpPr/>
@@ -7169,7 +7284,7 @@
       </p:sp>
       <p:sp>
         <p:nvSpPr>
-          <p:cNvPr id="15" name="Rounded Rectangle 14">
+          <p:cNvPr id="15" name="S003_P04_BACK">
             <a:hlinkClick r:id="rId2" action="ppaction://hlinksldjump"/>
           </p:cNvPr>
           <p:cNvSpPr/>
